--- a/ゲーム科2年/00_前期/ゲーム開発Ⅰ/14_継承を使ったシーン管理.pptx
+++ b/ゲーム科2年/00_前期/ゲーム開発Ⅰ/14_継承を使ったシーン管理.pptx
@@ -290,7 +290,7 @@
           <a:p>
             <a:fld id="{E9CC885B-4903-4D54-9A93-00025F12DED9}" type="datetimeFigureOut">
               <a:rPr kumimoji="1" lang="ja-JP" altLang="en-US" smtClean="0"/>
-              <a:t>2024/11/25</a:t>
+              <a:t>2025/2/7</a:t>
             </a:fld>
             <a:endParaRPr kumimoji="1" lang="ja-JP" altLang="en-US"/>
           </a:p>
@@ -520,7 +520,7 @@
           <a:p>
             <a:fld id="{E9CC885B-4903-4D54-9A93-00025F12DED9}" type="datetimeFigureOut">
               <a:rPr kumimoji="1" lang="ja-JP" altLang="en-US" smtClean="0"/>
-              <a:t>2024/11/25</a:t>
+              <a:t>2025/2/7</a:t>
             </a:fld>
             <a:endParaRPr kumimoji="1" lang="ja-JP" altLang="en-US"/>
           </a:p>
@@ -760,7 +760,7 @@
           <a:p>
             <a:fld id="{E9CC885B-4903-4D54-9A93-00025F12DED9}" type="datetimeFigureOut">
               <a:rPr kumimoji="1" lang="ja-JP" altLang="en-US" smtClean="0"/>
-              <a:t>2024/11/25</a:t>
+              <a:t>2025/2/7</a:t>
             </a:fld>
             <a:endParaRPr kumimoji="1" lang="ja-JP" altLang="en-US"/>
           </a:p>
@@ -990,7 +990,7 @@
           <a:p>
             <a:fld id="{E9CC885B-4903-4D54-9A93-00025F12DED9}" type="datetimeFigureOut">
               <a:rPr kumimoji="1" lang="ja-JP" altLang="en-US" smtClean="0"/>
-              <a:t>2024/11/25</a:t>
+              <a:t>2025/2/7</a:t>
             </a:fld>
             <a:endParaRPr kumimoji="1" lang="ja-JP" altLang="en-US"/>
           </a:p>
@@ -1265,7 +1265,7 @@
           <a:p>
             <a:fld id="{E9CC885B-4903-4D54-9A93-00025F12DED9}" type="datetimeFigureOut">
               <a:rPr kumimoji="1" lang="ja-JP" altLang="en-US" smtClean="0"/>
-              <a:t>2024/11/25</a:t>
+              <a:t>2025/2/7</a:t>
             </a:fld>
             <a:endParaRPr kumimoji="1" lang="ja-JP" altLang="en-US"/>
           </a:p>
@@ -1594,7 +1594,7 @@
           <a:p>
             <a:fld id="{E9CC885B-4903-4D54-9A93-00025F12DED9}" type="datetimeFigureOut">
               <a:rPr kumimoji="1" lang="ja-JP" altLang="en-US" smtClean="0"/>
-              <a:t>2024/11/25</a:t>
+              <a:t>2025/2/7</a:t>
             </a:fld>
             <a:endParaRPr kumimoji="1" lang="ja-JP" altLang="en-US"/>
           </a:p>
@@ -2070,7 +2070,7 @@
           <a:p>
             <a:fld id="{E9CC885B-4903-4D54-9A93-00025F12DED9}" type="datetimeFigureOut">
               <a:rPr kumimoji="1" lang="ja-JP" altLang="en-US" smtClean="0"/>
-              <a:t>2024/11/25</a:t>
+              <a:t>2025/2/7</a:t>
             </a:fld>
             <a:endParaRPr kumimoji="1" lang="ja-JP" altLang="en-US"/>
           </a:p>
@@ -2211,7 +2211,7 @@
           <a:p>
             <a:fld id="{E9CC885B-4903-4D54-9A93-00025F12DED9}" type="datetimeFigureOut">
               <a:rPr kumimoji="1" lang="ja-JP" altLang="en-US" smtClean="0"/>
-              <a:t>2024/11/25</a:t>
+              <a:t>2025/2/7</a:t>
             </a:fld>
             <a:endParaRPr kumimoji="1" lang="ja-JP" altLang="en-US"/>
           </a:p>
@@ -2324,7 +2324,7 @@
           <a:p>
             <a:fld id="{E9CC885B-4903-4D54-9A93-00025F12DED9}" type="datetimeFigureOut">
               <a:rPr kumimoji="1" lang="ja-JP" altLang="en-US" smtClean="0"/>
-              <a:t>2024/11/25</a:t>
+              <a:t>2025/2/7</a:t>
             </a:fld>
             <a:endParaRPr kumimoji="1" lang="ja-JP" altLang="en-US"/>
           </a:p>
@@ -2667,7 +2667,7 @@
           <a:p>
             <a:fld id="{E9CC885B-4903-4D54-9A93-00025F12DED9}" type="datetimeFigureOut">
               <a:rPr kumimoji="1" lang="ja-JP" altLang="en-US" smtClean="0"/>
-              <a:t>2024/11/25</a:t>
+              <a:t>2025/2/7</a:t>
             </a:fld>
             <a:endParaRPr kumimoji="1" lang="ja-JP" altLang="en-US"/>
           </a:p>
@@ -2955,7 +2955,7 @@
           <a:p>
             <a:fld id="{E9CC885B-4903-4D54-9A93-00025F12DED9}" type="datetimeFigureOut">
               <a:rPr kumimoji="1" lang="ja-JP" altLang="en-US" smtClean="0"/>
-              <a:t>2024/11/25</a:t>
+              <a:t>2025/2/7</a:t>
             </a:fld>
             <a:endParaRPr kumimoji="1" lang="ja-JP" altLang="en-US"/>
           </a:p>
@@ -3228,7 +3228,7 @@
           <a:p>
             <a:fld id="{E9CC885B-4903-4D54-9A93-00025F12DED9}" type="datetimeFigureOut">
               <a:rPr kumimoji="1" lang="ja-JP" altLang="en-US" smtClean="0"/>
-              <a:t>2024/11/25</a:t>
+              <a:t>2025/2/7</a:t>
             </a:fld>
             <a:endParaRPr kumimoji="1" lang="ja-JP" altLang="en-US"/>
           </a:p>
@@ -3805,7 +3805,7 @@
         <p:spPr>
           <a:xfrm>
             <a:off x="567542" y="1216429"/>
-            <a:ext cx="6909264" cy="461665"/>
+            <a:ext cx="7071167" cy="461665"/>
           </a:xfrm>
           <a:prstGeom prst="rect">
             <a:avLst/>
@@ -3819,7 +3819,11 @@
           <a:lstStyle/>
           <a:p>
             <a:r>
-              <a:rPr lang="en-US" altLang="ja-JP" sz="2400" dirty="0"/>
+              <a:rPr lang="en-US" altLang="ja-JP" sz="2400" b="1" dirty="0">
+                <a:solidFill>
+                  <a:srgbClr val="FF0000"/>
+                </a:solidFill>
+              </a:rPr>
               <a:t>SceneManager.cpp</a:t>
             </a:r>
             <a:r>
@@ -3947,7 +3951,7 @@
         <p:spPr>
           <a:xfrm>
             <a:off x="567542" y="1216429"/>
-            <a:ext cx="6909264" cy="461665"/>
+            <a:ext cx="7071167" cy="461665"/>
           </a:xfrm>
           <a:prstGeom prst="rect">
             <a:avLst/>
@@ -3961,7 +3965,11 @@
           <a:lstStyle/>
           <a:p>
             <a:r>
-              <a:rPr lang="en-US" altLang="ja-JP" sz="2400" dirty="0"/>
+              <a:rPr lang="en-US" altLang="ja-JP" sz="2400" b="1" dirty="0">
+                <a:solidFill>
+                  <a:srgbClr val="FF0000"/>
+                </a:solidFill>
+              </a:rPr>
               <a:t>SceneManager.cpp</a:t>
             </a:r>
             <a:r>
@@ -4089,7 +4097,7 @@
         <p:spPr>
           <a:xfrm>
             <a:off x="567542" y="1216429"/>
-            <a:ext cx="6909264" cy="461665"/>
+            <a:ext cx="7071167" cy="461665"/>
           </a:xfrm>
           <a:prstGeom prst="rect">
             <a:avLst/>
@@ -4103,7 +4111,11 @@
           <a:lstStyle/>
           <a:p>
             <a:r>
-              <a:rPr lang="en-US" altLang="ja-JP" sz="2400" dirty="0"/>
+              <a:rPr lang="en-US" altLang="ja-JP" sz="2400" b="1" dirty="0">
+                <a:solidFill>
+                  <a:srgbClr val="FF0000"/>
+                </a:solidFill>
+              </a:rPr>
               <a:t>SceneManager.cpp</a:t>
             </a:r>
             <a:r>
@@ -4267,7 +4279,7 @@
         <p:spPr>
           <a:xfrm>
             <a:off x="567542" y="1216429"/>
-            <a:ext cx="3797835" cy="461665"/>
+            <a:ext cx="3911648" cy="461665"/>
           </a:xfrm>
           <a:prstGeom prst="rect">
             <a:avLst/>
@@ -4281,7 +4293,11 @@
           <a:lstStyle/>
           <a:p>
             <a:r>
-              <a:rPr lang="en-US" altLang="ja-JP" sz="2400" dirty="0" err="1"/>
+              <a:rPr lang="en-US" altLang="ja-JP" sz="2400" b="1" dirty="0" err="1">
+                <a:solidFill>
+                  <a:srgbClr val="FF0000"/>
+                </a:solidFill>
+              </a:rPr>
               <a:t>TitleScene.h</a:t>
             </a:r>
             <a:r>
@@ -4409,7 +4425,7 @@
         <p:spPr>
           <a:xfrm>
             <a:off x="567542" y="1216429"/>
-            <a:ext cx="5673348" cy="461665"/>
+            <a:ext cx="5808000" cy="461665"/>
           </a:xfrm>
           <a:prstGeom prst="rect">
             <a:avLst/>
@@ -4423,7 +4439,11 @@
           <a:lstStyle/>
           <a:p>
             <a:r>
-              <a:rPr lang="en-US" altLang="ja-JP" sz="2400" dirty="0"/>
+              <a:rPr lang="en-US" altLang="ja-JP" sz="2400" b="1" dirty="0">
+                <a:solidFill>
+                  <a:srgbClr val="FF0000"/>
+                </a:solidFill>
+              </a:rPr>
               <a:t>TitleScene.cpp</a:t>
             </a:r>
             <a:r>
@@ -4551,7 +4571,7 @@
         <p:spPr>
           <a:xfrm>
             <a:off x="567542" y="1216429"/>
-            <a:ext cx="5673348" cy="461665"/>
+            <a:ext cx="5808000" cy="461665"/>
           </a:xfrm>
           <a:prstGeom prst="rect">
             <a:avLst/>
@@ -4565,7 +4585,11 @@
           <a:lstStyle/>
           <a:p>
             <a:r>
-              <a:rPr lang="en-US" altLang="ja-JP" sz="2400" dirty="0"/>
+              <a:rPr lang="en-US" altLang="ja-JP" sz="2400" b="1" dirty="0">
+                <a:solidFill>
+                  <a:srgbClr val="FF0000"/>
+                </a:solidFill>
+              </a:rPr>
               <a:t>TitleScene.cpp</a:t>
             </a:r>
             <a:r>
@@ -4693,7 +4717,7 @@
         <p:spPr>
           <a:xfrm>
             <a:off x="567542" y="1216429"/>
-            <a:ext cx="7821372" cy="461665"/>
+            <a:ext cx="8023350" cy="461665"/>
           </a:xfrm>
           <a:prstGeom prst="rect">
             <a:avLst/>
@@ -4707,15 +4731,31 @@
           <a:lstStyle/>
           <a:p>
             <a:r>
-              <a:rPr lang="en-US" altLang="ja-JP" sz="2400" dirty="0" err="1"/>
+              <a:rPr lang="en-US" altLang="ja-JP" sz="2400" b="1" dirty="0" err="1">
+                <a:solidFill>
+                  <a:srgbClr val="0070C0"/>
+                </a:solidFill>
+              </a:rPr>
               <a:t>CreateScene</a:t>
             </a:r>
             <a:r>
+              <a:rPr lang="ja-JP" altLang="en-US" sz="2400" b="1" dirty="0">
+                <a:solidFill>
+                  <a:srgbClr val="0070C0"/>
+                </a:solidFill>
+              </a:rPr>
+              <a:t>関数</a:t>
+            </a:r>
+            <a:r>
               <a:rPr lang="ja-JP" altLang="en-US" sz="2400" dirty="0"/>
-              <a:t>関数に</a:t>
-            </a:r>
-            <a:r>
-              <a:rPr lang="en-US" altLang="ja-JP" sz="2400" dirty="0" err="1"/>
+              <a:t>に</a:t>
+            </a:r>
+            <a:r>
+              <a:rPr lang="en-US" altLang="ja-JP" sz="2400" b="1" dirty="0" err="1">
+                <a:solidFill>
+                  <a:srgbClr val="00B050"/>
+                </a:solidFill>
+              </a:rPr>
               <a:t>TitleScene</a:t>
             </a:r>
             <a:r>
@@ -4843,7 +4883,7 @@
         <p:spPr>
           <a:xfrm>
             <a:off x="567542" y="1216429"/>
-            <a:ext cx="8236550" cy="461665"/>
+            <a:ext cx="8438529" cy="461665"/>
           </a:xfrm>
           <a:prstGeom prst="rect">
             <a:avLst/>
@@ -4857,7 +4897,11 @@
           <a:lstStyle/>
           <a:p>
             <a:r>
-              <a:rPr lang="en-US" altLang="ja-JP" sz="2400" dirty="0"/>
+              <a:rPr lang="en-US" altLang="ja-JP" sz="2400" b="1" dirty="0">
+                <a:solidFill>
+                  <a:srgbClr val="FF0000"/>
+                </a:solidFill>
+              </a:rPr>
               <a:t>Main.cpp</a:t>
             </a:r>
             <a:r>
@@ -4865,9 +4909,9 @@
               <a:t>で</a:t>
             </a:r>
             <a:r>
-              <a:rPr lang="en-US" altLang="ja-JP" sz="2400" dirty="0" err="1">
+              <a:rPr lang="en-US" altLang="ja-JP" sz="2400" b="1" dirty="0" err="1">
                 <a:solidFill>
-                  <a:srgbClr val="0070C0"/>
+                  <a:srgbClr val="00B050"/>
                 </a:solidFill>
               </a:rPr>
               <a:t>SceneManager</a:t>
@@ -5260,9 +5304,9 @@
           <a:lstStyle/>
           <a:p>
             <a:r>
-              <a:rPr lang="en-US" altLang="ja-JP" sz="2400" dirty="0" err="1">
+              <a:rPr lang="en-US" altLang="ja-JP" sz="2400" b="1" dirty="0" err="1">
                 <a:solidFill>
-                  <a:srgbClr val="0070C0"/>
+                  <a:srgbClr val="00B050"/>
                 </a:solidFill>
               </a:rPr>
               <a:t>SceneBase</a:t>
@@ -5517,7 +5561,7 @@
         <p:spPr>
           <a:xfrm>
             <a:off x="567542" y="1216429"/>
-            <a:ext cx="10966464" cy="830997"/>
+            <a:ext cx="11136382" cy="830997"/>
           </a:xfrm>
           <a:prstGeom prst="rect">
             <a:avLst/>
@@ -5531,9 +5575,9 @@
           <a:lstStyle/>
           <a:p>
             <a:r>
-              <a:rPr lang="en-US" altLang="ja-JP" sz="2400" dirty="0" err="1">
+              <a:rPr lang="en-US" altLang="ja-JP" sz="2400" b="1" dirty="0" err="1">
                 <a:solidFill>
-                  <a:srgbClr val="0070C0"/>
+                  <a:srgbClr val="00B050"/>
                 </a:solidFill>
               </a:rPr>
               <a:t>PlayScene</a:t>
@@ -5543,9 +5587,9 @@
               <a:t>を完成させます。</a:t>
             </a:r>
             <a:r>
-              <a:rPr lang="en-US" altLang="ja-JP" sz="2400" dirty="0">
+              <a:rPr lang="en-US" altLang="ja-JP" sz="2400" b="1" dirty="0">
                 <a:solidFill>
-                  <a:srgbClr val="0070C0"/>
+                  <a:srgbClr val="FF0000"/>
                 </a:solidFill>
               </a:rPr>
               <a:t>Main.cpp</a:t>
@@ -5566,9 +5610,9 @@
           </a:p>
           <a:p>
             <a:r>
-              <a:rPr lang="en-US" altLang="ja-JP" sz="2400" dirty="0" err="1">
+              <a:rPr lang="en-US" altLang="ja-JP" sz="2400" b="1" dirty="0" err="1">
                 <a:solidFill>
-                  <a:srgbClr val="0070C0"/>
+                  <a:srgbClr val="00B050"/>
                 </a:solidFill>
               </a:rPr>
               <a:t>PlayScene</a:t>
@@ -5678,7 +5722,7 @@
         <p:spPr>
           <a:xfrm>
             <a:off x="5243304" y="2774264"/>
-            <a:ext cx="4876656" cy="461665"/>
+            <a:ext cx="4956806" cy="461665"/>
           </a:xfrm>
           <a:prstGeom prst="rect">
             <a:avLst/>
@@ -5692,7 +5736,11 @@
           <a:lstStyle/>
           <a:p>
             <a:r>
-              <a:rPr lang="en-US" altLang="ja-JP" sz="2400" dirty="0"/>
+              <a:rPr lang="en-US" altLang="ja-JP" sz="2400" b="1" dirty="0">
+                <a:solidFill>
+                  <a:srgbClr val="FF0000"/>
+                </a:solidFill>
+              </a:rPr>
               <a:t>Main.cpp</a:t>
             </a:r>
             <a:r>
@@ -5718,7 +5766,7 @@
         <p:spPr>
           <a:xfrm>
             <a:off x="6657350" y="5037171"/>
-            <a:ext cx="3204723" cy="461665"/>
+            <a:ext cx="3294492" cy="461665"/>
           </a:xfrm>
           <a:prstGeom prst="rect">
             <a:avLst/>
@@ -5732,7 +5780,11 @@
           <a:lstStyle/>
           <a:p>
             <a:r>
-              <a:rPr lang="en-US" altLang="ja-JP" sz="2400" dirty="0" err="1"/>
+              <a:rPr lang="en-US" altLang="ja-JP" sz="2400" b="1" dirty="0" err="1">
+                <a:solidFill>
+                  <a:srgbClr val="00B050"/>
+                </a:solidFill>
+              </a:rPr>
               <a:t>PlayScene</a:t>
             </a:r>
             <a:r>
@@ -6062,7 +6114,7 @@
         <p:spPr>
           <a:xfrm>
             <a:off x="567542" y="1216429"/>
-            <a:ext cx="10456709" cy="3785652"/>
+            <a:ext cx="10698763" cy="3785652"/>
           </a:xfrm>
           <a:prstGeom prst="rect">
             <a:avLst/>
@@ -6178,23 +6230,19 @@
               <a:t>・</a:t>
             </a:r>
             <a:r>
-              <a:rPr lang="en-US" altLang="ja-JP" sz="2400" dirty="0" err="1">
+              <a:rPr lang="en-US" altLang="ja-JP" sz="2400" b="1" dirty="0" err="1">
                 <a:solidFill>
-                  <a:srgbClr val="0070C0"/>
+                  <a:srgbClr val="00B050"/>
                 </a:solidFill>
               </a:rPr>
               <a:t>SceneManager</a:t>
             </a:r>
             <a:r>
-              <a:rPr lang="en-US" altLang="ja-JP" sz="2400" dirty="0">
-                <a:solidFill>
-                  <a:srgbClr val="0070C0"/>
-                </a:solidFill>
-              </a:rPr>
+              <a:rPr lang="en-US" altLang="ja-JP" sz="2400" b="1" dirty="0"/>
               <a:t>::</a:t>
             </a:r>
             <a:r>
-              <a:rPr lang="en-US" altLang="ja-JP" sz="2400" dirty="0" err="1">
+              <a:rPr lang="en-US" altLang="ja-JP" sz="2400" b="1" dirty="0" err="1">
                 <a:solidFill>
                   <a:srgbClr val="0070C0"/>
                 </a:solidFill>
@@ -6202,8 +6250,16 @@
               <a:t>SceneCreate</a:t>
             </a:r>
             <a:r>
+              <a:rPr lang="ja-JP" altLang="en-US" sz="2400" b="1" dirty="0">
+                <a:solidFill>
+                  <a:srgbClr val="0070C0"/>
+                </a:solidFill>
+              </a:rPr>
+              <a:t>関数</a:t>
+            </a:r>
+            <a:r>
               <a:rPr lang="ja-JP" altLang="en-US" sz="2400" dirty="0"/>
-              <a:t>関数に</a:t>
+              <a:t>に</a:t>
             </a:r>
             <a:r>
               <a:rPr lang="en-US" altLang="ja-JP" sz="2400" dirty="0"/>
@@ -6240,15 +6296,7 @@
             </a:r>
             <a:r>
               <a:rPr lang="ja-JP" altLang="en-US" sz="2400" dirty="0"/>
-              <a:t>シーンに切り替わり、これ</a:t>
-            </a:r>
-            <a:r>
-              <a:rPr lang="ja-JP" altLang="en-US" sz="2400"/>
-              <a:t>まで通りに動きます</a:t>
-            </a:r>
-            <a:r>
-              <a:rPr lang="ja-JP" altLang="en-US" sz="2400" dirty="0"/>
-              <a:t>。</a:t>
+              <a:t>シーンに切り替わり、これまで通りに動きます。</a:t>
             </a:r>
             <a:endParaRPr lang="en-US" altLang="ja-JP" sz="2400" dirty="0"/>
           </a:p>
@@ -6335,7 +6383,7 @@
         <p:spPr>
           <a:xfrm>
             <a:off x="567542" y="1216429"/>
-            <a:ext cx="4487126" cy="461665"/>
+            <a:ext cx="4592924" cy="461665"/>
           </a:xfrm>
           <a:prstGeom prst="rect">
             <a:avLst/>
@@ -6349,7 +6397,11 @@
           <a:lstStyle/>
           <a:p>
             <a:r>
-              <a:rPr lang="en-US" altLang="ja-JP" sz="2400" dirty="0" err="1"/>
+              <a:rPr lang="en-US" altLang="ja-JP" sz="2400" b="1" dirty="0" err="1">
+                <a:solidFill>
+                  <a:srgbClr val="FF0000"/>
+                </a:solidFill>
+              </a:rPr>
               <a:t>SceneBase.h</a:t>
             </a:r>
             <a:r>
@@ -6477,7 +6529,7 @@
         <p:spPr>
           <a:xfrm>
             <a:off x="567542" y="1216429"/>
-            <a:ext cx="4823756" cy="461665"/>
+            <a:ext cx="4950394" cy="461665"/>
           </a:xfrm>
           <a:prstGeom prst="rect">
             <a:avLst/>
@@ -6491,7 +6543,11 @@
           <a:lstStyle/>
           <a:p>
             <a:r>
-              <a:rPr lang="en-US" altLang="ja-JP" sz="2400" dirty="0"/>
+              <a:rPr lang="en-US" altLang="ja-JP" sz="2400" b="1" dirty="0">
+                <a:solidFill>
+                  <a:srgbClr val="FF0000"/>
+                </a:solidFill>
+              </a:rPr>
               <a:t>SceneBase.cpp</a:t>
             </a:r>
             <a:r>
@@ -6619,7 +6675,7 @@
         <p:spPr>
           <a:xfrm>
             <a:off x="567542" y="1216429"/>
-            <a:ext cx="5266185" cy="461665"/>
+            <a:ext cx="5423280" cy="461665"/>
           </a:xfrm>
           <a:prstGeom prst="rect">
             <a:avLst/>
@@ -6633,7 +6689,11 @@
           <a:lstStyle/>
           <a:p>
             <a:r>
-              <a:rPr lang="en-US" altLang="ja-JP" sz="2400" dirty="0" err="1"/>
+              <a:rPr lang="en-US" altLang="ja-JP" sz="2400" b="1" dirty="0" err="1">
+                <a:solidFill>
+                  <a:srgbClr val="FF0000"/>
+                </a:solidFill>
+              </a:rPr>
               <a:t>SceneParameter.h</a:t>
             </a:r>
             <a:r>
@@ -6713,7 +6773,7 @@
               <a:t>このように</a:t>
             </a:r>
             <a:r>
-              <a:rPr lang="en-US" altLang="ja-JP" sz="2400" dirty="0" err="1">
+              <a:rPr lang="en-US" altLang="ja-JP" sz="2400" b="1" dirty="0" err="1">
                 <a:solidFill>
                   <a:srgbClr val="0070C0"/>
                 </a:solidFill>
@@ -6816,7 +6876,7 @@
         <p:spPr>
           <a:xfrm>
             <a:off x="567542" y="1216429"/>
-            <a:ext cx="6572633" cy="461665"/>
+            <a:ext cx="6713697" cy="461665"/>
           </a:xfrm>
           <a:prstGeom prst="rect">
             <a:avLst/>
@@ -6830,7 +6890,11 @@
           <a:lstStyle/>
           <a:p>
             <a:r>
-              <a:rPr lang="en-US" altLang="ja-JP" sz="2400" dirty="0" err="1"/>
+              <a:rPr lang="en-US" altLang="ja-JP" sz="2400" b="1" dirty="0" err="1">
+                <a:solidFill>
+                  <a:srgbClr val="FF0000"/>
+                </a:solidFill>
+              </a:rPr>
               <a:t>SceneManager.h</a:t>
             </a:r>
             <a:r>
@@ -6958,7 +7022,7 @@
         <p:spPr>
           <a:xfrm>
             <a:off x="567542" y="1216429"/>
-            <a:ext cx="6572633" cy="461665"/>
+            <a:ext cx="6713697" cy="461665"/>
           </a:xfrm>
           <a:prstGeom prst="rect">
             <a:avLst/>
@@ -6972,7 +7036,11 @@
           <a:lstStyle/>
           <a:p>
             <a:r>
-              <a:rPr lang="en-US" altLang="ja-JP" sz="2400" dirty="0" err="1"/>
+              <a:rPr lang="en-US" altLang="ja-JP" sz="2400" b="1" dirty="0" err="1">
+                <a:solidFill>
+                  <a:srgbClr val="FF0000"/>
+                </a:solidFill>
+              </a:rPr>
               <a:t>SceneManager.h</a:t>
             </a:r>
             <a:r>
@@ -7100,7 +7168,7 @@
         <p:spPr>
           <a:xfrm>
             <a:off x="567542" y="1216429"/>
-            <a:ext cx="6909264" cy="461665"/>
+            <a:ext cx="7071167" cy="461665"/>
           </a:xfrm>
           <a:prstGeom prst="rect">
             <a:avLst/>
@@ -7114,7 +7182,11 @@
           <a:lstStyle/>
           <a:p>
             <a:r>
-              <a:rPr lang="en-US" altLang="ja-JP" sz="2400" dirty="0"/>
+              <a:rPr lang="en-US" altLang="ja-JP" sz="2400" b="1" dirty="0">
+                <a:solidFill>
+                  <a:srgbClr val="FF0000"/>
+                </a:solidFill>
+              </a:rPr>
               <a:t>SceneManager.cpp</a:t>
             </a:r>
             <a:r>
@@ -7242,7 +7314,7 @@
         <p:spPr>
           <a:xfrm>
             <a:off x="567542" y="1216429"/>
-            <a:ext cx="6909264" cy="461665"/>
+            <a:ext cx="7071167" cy="461665"/>
           </a:xfrm>
           <a:prstGeom prst="rect">
             <a:avLst/>
@@ -7256,7 +7328,11 @@
           <a:lstStyle/>
           <a:p>
             <a:r>
-              <a:rPr lang="en-US" altLang="ja-JP" sz="2400" dirty="0"/>
+              <a:rPr lang="en-US" altLang="ja-JP" sz="2400" b="1" dirty="0">
+                <a:solidFill>
+                  <a:srgbClr val="FF0000"/>
+                </a:solidFill>
+              </a:rPr>
               <a:t>SceneManager.cpp</a:t>
             </a:r>
             <a:r>
